--- a/matlab_app/docs/kernel_guide/加法カーネルと交互作用の解説.pptx
+++ b/matlab_app/docs/kernel_guide/加法カーネルと交互作用の解説.pptx
@@ -1061,7 +1061,7 @@
           <a:lstStyle/>
           <a:p>
             <a:r>
-              <a:t>アプリの GPR で「加法カーネル」「加法カーネル＋交互作用」を選んだときに、カーネルがどんな式になっているかを説明する資料。右の図は、模擬データの1枚で推定した超パラメータから、1点の値の分散が各項にどれだけ割り振られたかを示す。</a:t>
+              <a:t>アプリの GPR で「加法カーネル」「加法カーネル＋交互作用」を選んだときに、カーネルがどんな式になっているかを説明する資料。右の図は、模擬データの1枚で推定したハイパーパラメータから、1点の値の分散が各項にどれだけ割り振られたかを示す。</a:t>
             </a:r>
           </a:p>
         </p:txBody>
@@ -1551,7 +1551,7 @@
           <a:lstStyle/>
           <a:p>
             <a:r>
-              <a:t>同梱の模擬データは、Scan 方向の差と Mark 番号ごとのずれを入れて作り、交互作用は入れていない。X 成分では τ_sm が下限付近まで小さくなり、データに交互作用が無いことと合っている。Y 成分では τ_s・τ_m が小さくなり、τ_sm がずれを引き受けた。Scan 2 × Mark 4 の 8 通りの組み合わせごとのずれは、主効果の足し算も表せるので、どの項に割り振るかがデータだけでは決まりにくい（予測値はどちらでも近い）。値は Excel の「Waferごと」の超パラメータ（tau_scan_X・tau_mark_X・tau_scan_mark_X など）と同じ。</a:t>
+              <a:t>同梱の模擬データは、Scan 方向の差と Mark 番号ごとのずれを入れて作り、交互作用は入れていない。X 成分では τ_sm が下限付近まで小さくなり、データに交互作用が無いことと合っている。Y 成分では τ_s・τ_m が小さくなり、τ_sm がずれを引き受けた。Scan 2 × Mark 4 の 8 通りの組み合わせごとのずれは、主効果の足し算も表せるので、どの項に割り振るかがデータだけでは決まりにくい（予測値はどちらでも近い）。値は Excel の「Waferごと」のハイパーパラメータ（tau_scan_X・tau_mark_X・tau_scan_mark_X など）と同じ。</a:t>
             </a:r>
           </a:p>
         </p:txBody>
@@ -1621,7 +1621,7 @@
           <a:lstStyle/>
           <a:p>
             <a:r>
-              <a:t>推定した超パラメータで、2点のカーネルの値（共分散）を項ごとに分けた。0 の欄は、その項の条件（同じ水準）を満たさないため。自分自身との値は、各項の分散の和（ノイズを除く）。</a:t>
+              <a:t>推定したハイパーパラメータで、2点のカーネルの値（共分散）を項ごとに分けた。0 の欄は、その項の条件（同じ水準）を満たさないため。自分自身との値は、各項の分散の和（ノイズを除く）。</a:t>
             </a:r>
           </a:p>
         </p:txBody>
@@ -1691,7 +1691,7 @@
           <a:lstStyle/>
           <a:p>
             <a:r>
-              <a:t>推定値 = 平均 + 空間 + 質的変数の各項。質的変数の項は、その水準の学習点の α の和に τ² を掛けた値（変量効果の予測、BLUP）。同じ学習点で同時推定（固定効果）にしたときの効果の値と比べると、符号と並びは同じで、0 の方へ縮んでいる。τ が小さい Scan 方向ほど強く縮む。固定効果の値は別のモデル（超パラメータも別に推定）なので、比はおおよその目安。</a:t>
+              <a:t>推定値 = 平均 + 空間 + 質的変数の各項。質的変数の項は、その水準の学習点の α の和に τ² を掛けた値（変量効果の予測、BLUP）。同じ学習点で同時推定（固定効果）にしたときの効果の値と比べると、符号と並びは同じで、0 の方へ縮んでいる。τ が小さい Scan 方向ほど強く縮む。固定効果の値は別のモデル（ハイパーパラメータも別に推定）なので、比はおおよその目安。</a:t>
             </a:r>
           </a:p>
         </p:txBody>
@@ -1901,7 +1901,7 @@
           <a:lstStyle/>
           <a:p>
             <a:r>
-              <a:t>加法カーネルの項は gprModeSetup で 0・1 の行列として作り、gprKernel で τ² を掛けて空間のカーネルに足す。推定した τ は Excel の超パラメータの欄で確かめられる。</a:t>
+              <a:t>加法カーネルの項は gprModeSetup で 0・1 の行列として作り、gprKernel で τ² を掛けて空間のカーネルに足す。推定した τ は Excel のハイパーパラメータの欄で確かめられる。</a:t>
             </a:r>
           </a:p>
         </p:txBody>
@@ -1971,7 +1971,7 @@
           <a:lstStyle/>
           <a:p>
             <a:r>
-              <a:t>加法カーネルは効かない変数を自動で弱められるが、超パラメータが増えるので計算時間は増える。同じ分け方の変数を2つ選ぶと、どちらの τ に割り振るかが決まらない（予測値は変わらない）。</a:t>
+              <a:t>加法カーネルは効かない変数を自動で弱められるが、ハイパーパラメータが増えるので計算時間は増える。同じ分け方の変数を2つ選ぶと、どちらの τ に割り振るかが決まらない（予測値は変わらない）。</a:t>
             </a:r>
           </a:p>
         </p:txBody>
@@ -2041,7 +2041,7 @@
           <a:lstStyle/>
           <a:p>
             <a:r>
-              <a:t>加法カーネルと交互作用の要点。実データでは、交互作用の有無はデータ次第なので、アプリの結果一覧と超パラメータで確かめる。</a:t>
+              <a:t>加法カーネルと交互作用の要点。実データでは、交互作用の有無はデータ次第なので、アプリの結果一覧とハイパーパラメータで確かめる。</a:t>
             </a:r>
           </a:p>
         </p:txBody>
@@ -2391,7 +2391,7 @@
           <a:lstStyle/>
           <a:p>
             <a:r>
-              <a:t>加法カーネルは、空間のカーネルに、質的変数ごとの「水準が同じなら τ²」の項を足したもの。τ は変数ごとに1つの超パラメータで、空間の長さスケールなどと一緒に推定する。</a:t>
+              <a:t>加法カーネルは、空間のカーネルに、質的変数ごとの「水準が同じなら τ²」の項を足したもの。τ は変数ごとに1つのハイパーパラメータで、空間の長さスケールなどと一緒に推定する。</a:t>
             </a:r>
           </a:p>
         </p:txBody>
@@ -5080,7 +5080,7 @@
                           <a:ea typeface="BIZ UDGothic"/>
                           <a:cs typeface="BIZ UDGothic"/>
                         </a:rPr>
-                        <a:t>超パラメータ </a:t>
+                        <a:t>ハイパーパラメータ </a:t>
                       </a:r>
                       <a:r>
                         <a:rPr sz="1300" b="0">
@@ -21948,7 +21948,7 @@
                 <a:ea typeface="BIZ UDGothic"/>
                 <a:cs typeface="BIZ UDGothic"/>
               </a:rPr>
-              <a:t>超パラメータの推定 ― τ も一緒に尤度で選ぶ</a:t>
+              <a:t>ハイパーパラメータの推定 ― τ も一緒に尤度で選ぶ</a:t>
             </a:r>
           </a:p>
         </p:txBody>
@@ -22216,7 +22216,7 @@
                           <a:ea typeface="BIZ UDGothic"/>
                           <a:cs typeface="BIZ UDGothic"/>
                         </a:rPr>
-                        <a:t>超パラメータ</a:t>
+                        <a:t>ハイパーパラメータ</a:t>
                       </a:r>
                     </a:p>
                   </a:txBody>
@@ -23777,7 +23777,7 @@
                 <a:ea typeface="BIZ UDGothic"/>
                 <a:cs typeface="BIZ UDGothic"/>
               </a:rPr>
-              <a:t>β（平均）は一般化最小二乗で消去して、超パラメータだけを探す。</a:t>
+              <a:t>β（平均）は一般化最小二乗で消去して、ハイパーパラメータだけを探す。</a:t>
             </a:r>
             <a:r>
               <a:rPr sz="1400" b="1">
@@ -23950,7 +23950,7 @@
                 <a:ea typeface="BIZ UDGothic"/>
                 <a:cs typeface="BIZ UDGothic"/>
               </a:rPr>
-              <a:t>計算例 ① ― 模擬データで推定した超パラメータ</a:t>
+              <a:t>計算例 ① ― 模擬データで推定したハイパーパラメータ</a:t>
             </a:r>
           </a:p>
         </p:txBody>
@@ -24099,7 +24099,7 @@
                           <a:ea typeface="BIZ UDGothic"/>
                           <a:cs typeface="BIZ UDGothic"/>
                         </a:rPr>
-                        <a:t>超パラメータ</a:t>
+                        <a:t>ハイパーパラメータ</a:t>
                       </a:r>
                     </a:p>
                   </a:txBody>
@@ -33293,7 +33293,7 @@
                 <a:ea typeface="BIZ UDGothic"/>
                 <a:cs typeface="BIZ UDGothic"/>
               </a:rPr>
-              <a:t>超パラメータの推定、模擬データでの数値例、アプリでの場所、使い分けと注意点</a:t>
+              <a:t>ハイパーパラメータの推定、模擬データでの数値例、アプリでの場所、使い分けと注意点</a:t>
             </a:r>
           </a:p>
         </p:txBody>
@@ -35075,7 +35075,7 @@
                 <a:ea typeface="BIZ UDGothic"/>
                 <a:cs typeface="BIZ UDGothic"/>
               </a:rPr>
-              <a:t>「Waferごと」の「超パラメータ」に tau_scan_X・tau_mark_X・tau_scan_mark_X（Y も）として出る</a:t>
+              <a:t>「Waferごと」の「ハイパーパラメータ」に tau_scan_X・tau_mark_X・tau_scan_mark_X（Y も）として出る</a:t>
             </a:r>
           </a:p>
         </p:txBody>
@@ -36952,7 +36952,7 @@
                 <a:ea typeface="BIZ UDGothic"/>
                 <a:cs typeface="BIZ UDGothic"/>
               </a:rPr>
-              <a:t> は空間の超パラメータと一緒に尤度で推定。主効果と交互作用でずれを分け合うことがあるので、</a:t>
+              <a:t> は空間のハイパーパラメータと一緒に尤度で推定。主効果と交互作用でずれを分け合うことがあるので、</a:t>
             </a:r>
             <a:r>
               <a:rPr sz="1700" b="0">
@@ -40739,7 +40739,7 @@
                 <a:ea typeface="BIZ UDGothic"/>
                 <a:cs typeface="BIZ UDGothic"/>
               </a:rPr>
-              <a:t>。超パラメータ（</a:t>
+              <a:t>。ハイパーパラメータ（</a:t>
             </a:r>
             <a:r>
               <a:rPr sz="1500" b="1">

--- a/matlab_app/docs/kernel_guide/加法カーネルと交互作用の解説.pptx
+++ b/matlab_app/docs/kernel_guide/加法カーネルと交互作用の解説.pptx
@@ -2981,7 +2981,7 @@
                 <a:ea typeface="BIZ UDGothic"/>
                 <a:cs typeface="BIZ UDGothic"/>
               </a:rPr>
-              <a:t>技術解説資料 ｜ 面内推定 検証ツール（GPR）</a:t>
+              <a:t>技術解説資料 ｜ 面内推定評価ツール（GPR）</a:t>
             </a:r>
           </a:p>
         </p:txBody>
